--- a/outputs/ophthalmology-batch-20261011/flacs/slides_editable.pptx
+++ b/outputs/ophthalmology-batch-20261011/flacs/slides_editable.pptx
@@ -860,7 +860,7 @@
           <a:p/>
           <a:p>
             <a:r>
-              <a:t>flacs-10 角膜切口与散光：透明角膜切口不是必需；可用两/三平面，明显前移或定位困难可改手工。规则散光1.00～1.50 D或散光IOL残余此范围，可考虑松解切口。</a:t>
+              <a:t>flacs-10 角膜切口与散光：透明角膜切口不是必需；可用两/三平面，明显前移或定位困难可改手工。规则散光1.00～1.50 D或散光IOL术后残余散光在此范围，可考虑松解切口。</a:t>
             </a:r>
           </a:p>
           <a:p>
@@ -972,7 +972,7 @@
           <a:p/>
           <a:p>
             <a:r>
-              <a:t>flacs-12 术中难散瞳：可前房注射1∶10 000～1∶50 000稀释肾上腺素，和/或机械扩瞳；注射体积、所有药物具体品种及完整禁忌原文未明确。</a:t>
+              <a:t>flacs-12 术中难散瞳：可前房注射1∶10000～1∶50000稀释肾上腺素，和/或机械扩瞳；注射体积、所有药物具体品种及完整禁忌原文未明确。</a:t>
             </a:r>
           </a:p>
           <a:p>
@@ -1324,7 +1324,7 @@
           <a:p/>
           <a:p>
             <a:r>
-              <a:t>flacs-10 角膜切口与散光：透明角膜切口不是必需；可用两/三平面，明显前移或定位困难可改手工。规则散光1.00～1.50 D或散光IOL残余此范围，可考虑松解切口。</a:t>
+              <a:t>flacs-10 角膜切口与散光：透明角膜切口不是必需；可用两/三平面，明显前移或定位困难可改手工。规则散光1.00～1.50 D或散光IOL术后残余散光在此范围，可考虑松解切口。</a:t>
             </a:r>
           </a:p>
           <a:p>
@@ -8114,7 +8114,7 @@
                 <a:ea typeface="Microsoft YaHei"/>
                 <a:cs typeface="Microsoft YaHei"/>
               </a:rPr>
-              <a:t>光IOL残余此范围，可考虑松解切口。</a:t>
+              <a:t>光IOL术后残余散光在此范围，可考虑松解切口。</a:t>
             </a:r>
           </a:p>
         </p:txBody>
@@ -9066,7 +9066,7 @@
       </p:sp>
       <p:sp>
         <p:nvSpPr>
-          <p:cNvPr id="14" name="可前房注射1∶10 000～1∶50 000稀释肾上腺素，和/或机械扩瞳；注射体积、所有药物具体品种"/>
+          <p:cNvPr id="14" name="可前房注射1∶10000～1∶50000稀释肾上腺素，和/或机械扩瞳；注射体积、所有药物具体品种及完"/>
           <p:cNvSpPr txBox="1"/>
           <p:nvPr/>
         </p:nvSpPr>
@@ -9106,7 +9106,7 @@
                 <a:ea typeface="Microsoft YaHei"/>
                 <a:cs typeface="Microsoft YaHei"/>
               </a:rPr>
-              <a:t>可前房注射1∶10 000～1∶50 000稀释肾上腺素，和/或机械扩瞳；注射体积、所有药物具体品种及完</a:t>
+              <a:t>可前房注射1∶10000～1∶50000稀释肾上腺素，和/或机械扩瞳；注射体积、所有药物具体品种及完</a:t>
             </a:r>
           </a:p>
           <a:p>
